--- a/chapter5/parts/part-06-preprocessing-scaling-and-encoding/clip.pptx
+++ b/chapter5/parts/part-06-preprocessing-scaling-and-encoding/clip.pptx
@@ -4255,10 +4255,12 @@
           </a:bodyPr>
           <a:lstStyle/>
           <a:p>
-            <a:pPr>
+            <a:pPr lvl="0" marL="457200" indent="-228600">
+              <a:buFont typeface="Calibri"/>
               <a:spcAft>
                 <a:spcPts val="1000"/>
               </a:spcAft>
+              <a:buSzPct val="100000"/>
               <a:buChar char="•"/>
               <a:lnSpc>
                 <a:spcPts val="2200"/>
@@ -4275,10 +4277,12 @@
             </a:r>
           </a:p>
           <a:p>
-            <a:pPr>
+            <a:pPr lvl="0" marL="457200" indent="-228600">
+              <a:buFont typeface="Calibri"/>
               <a:spcAft>
                 <a:spcPts val="1000"/>
               </a:spcAft>
+              <a:buSzPct val="100000"/>
               <a:buChar char="•"/>
               <a:lnSpc>
                 <a:spcPts val="2200"/>
@@ -4414,10 +4418,12 @@
           </a:bodyPr>
           <a:lstStyle/>
           <a:p>
-            <a:pPr>
+            <a:pPr lvl="0" marL="457200" indent="-228600">
+              <a:buFont typeface="Calibri"/>
               <a:spcAft>
                 <a:spcPts val="1000"/>
               </a:spcAft>
+              <a:buSzPct val="100000"/>
               <a:buChar char="•"/>
               <a:lnSpc>
                 <a:spcPts val="2200"/>
@@ -4434,10 +4440,12 @@
             </a:r>
           </a:p>
           <a:p>
-            <a:pPr>
+            <a:pPr lvl="0" marL="457200" indent="-228600">
+              <a:buFont typeface="Calibri"/>
               <a:spcAft>
                 <a:spcPts val="1000"/>
               </a:spcAft>
+              <a:buSzPct val="100000"/>
               <a:buChar char="•"/>
               <a:lnSpc>
                 <a:spcPts val="2200"/>
@@ -4454,10 +4462,12 @@
             </a:r>
           </a:p>
           <a:p>
-            <a:pPr>
+            <a:pPr lvl="0" marL="457200" indent="-228600">
+              <a:buFont typeface="Calibri"/>
               <a:spcAft>
                 <a:spcPts val="1000"/>
               </a:spcAft>
+              <a:buSzPct val="100000"/>
               <a:buChar char="•"/>
               <a:lnSpc>
                 <a:spcPts val="2200"/>
@@ -4593,10 +4603,12 @@
           </a:bodyPr>
           <a:lstStyle/>
           <a:p>
-            <a:pPr>
+            <a:pPr lvl="0" marL="457200" indent="-228600">
+              <a:buFont typeface="Calibri"/>
               <a:spcAft>
                 <a:spcPts val="1000"/>
               </a:spcAft>
+              <a:buSzPct val="100000"/>
               <a:buChar char="•"/>
               <a:lnSpc>
                 <a:spcPts val="2200"/>
@@ -4613,10 +4625,12 @@
             </a:r>
           </a:p>
           <a:p>
-            <a:pPr>
+            <a:pPr lvl="0" marL="457200" indent="-228600">
+              <a:buFont typeface="Calibri"/>
               <a:spcAft>
                 <a:spcPts val="1000"/>
               </a:spcAft>
+              <a:buSzPct val="100000"/>
               <a:buChar char="•"/>
               <a:lnSpc>
                 <a:spcPts val="2200"/>
@@ -4633,10 +4647,12 @@
             </a:r>
           </a:p>
           <a:p>
-            <a:pPr>
+            <a:pPr lvl="0" marL="457200" indent="-228600">
+              <a:buFont typeface="Calibri"/>
               <a:spcAft>
                 <a:spcPts val="1000"/>
               </a:spcAft>
+              <a:buSzPct val="100000"/>
               <a:buChar char="•"/>
               <a:lnSpc>
                 <a:spcPts val="2200"/>
@@ -4653,10 +4669,12 @@
             </a:r>
           </a:p>
           <a:p>
-            <a:pPr>
+            <a:pPr lvl="0" marL="457200" indent="-228600">
+              <a:buFont typeface="Calibri"/>
               <a:spcAft>
                 <a:spcPts val="1000"/>
               </a:spcAft>
+              <a:buSzPct val="100000"/>
               <a:buChar char="•"/>
               <a:lnSpc>
                 <a:spcPts val="2200"/>
@@ -4792,10 +4810,12 @@
           </a:bodyPr>
           <a:lstStyle/>
           <a:p>
-            <a:pPr>
+            <a:pPr lvl="0" marL="457200" indent="-228600">
+              <a:buFont typeface="Calibri"/>
               <a:spcAft>
                 <a:spcPts val="1000"/>
               </a:spcAft>
+              <a:buSzPct val="100000"/>
               <a:buChar char="•"/>
               <a:lnSpc>
                 <a:spcPts val="2200"/>
@@ -4812,10 +4832,12 @@
             </a:r>
           </a:p>
           <a:p>
-            <a:pPr>
+            <a:pPr lvl="0" marL="457200" indent="-228600">
+              <a:buFont typeface="Calibri"/>
               <a:spcAft>
                 <a:spcPts val="1000"/>
               </a:spcAft>
+              <a:buSzPct val="100000"/>
               <a:buChar char="•"/>
               <a:lnSpc>
                 <a:spcPts val="2200"/>
@@ -4832,10 +4854,12 @@
             </a:r>
           </a:p>
           <a:p>
-            <a:pPr>
+            <a:pPr lvl="0" marL="457200" indent="-228600">
+              <a:buFont typeface="Calibri"/>
               <a:spcAft>
                 <a:spcPts val="1000"/>
               </a:spcAft>
+              <a:buSzPct val="100000"/>
               <a:buChar char="•"/>
               <a:lnSpc>
                 <a:spcPts val="2200"/>
@@ -4971,10 +4995,12 @@
           </a:bodyPr>
           <a:lstStyle/>
           <a:p>
-            <a:pPr>
+            <a:pPr lvl="0" marL="457200" indent="-228600">
+              <a:buFont typeface="Calibri"/>
               <a:spcAft>
                 <a:spcPts val="1000"/>
               </a:spcAft>
+              <a:buSzPct val="100000"/>
               <a:buChar char="•"/>
               <a:lnSpc>
                 <a:spcPts val="2200"/>
@@ -4991,10 +5017,12 @@
             </a:r>
           </a:p>
           <a:p>
-            <a:pPr>
+            <a:pPr lvl="0" marL="457200" indent="-228600">
+              <a:buFont typeface="Calibri"/>
               <a:spcAft>
                 <a:spcPts val="1000"/>
               </a:spcAft>
+              <a:buSzPct val="100000"/>
               <a:buChar char="•"/>
               <a:lnSpc>
                 <a:spcPts val="2200"/>
@@ -5130,10 +5158,12 @@
           </a:bodyPr>
           <a:lstStyle/>
           <a:p>
-            <a:pPr>
+            <a:pPr lvl="0" marL="457200" indent="-228600">
+              <a:buFont typeface="Calibri"/>
               <a:spcAft>
                 <a:spcPts val="1000"/>
               </a:spcAft>
+              <a:buSzPct val="100000"/>
               <a:buChar char="•"/>
               <a:lnSpc>
                 <a:spcPts val="2200"/>
@@ -5150,10 +5180,12 @@
             </a:r>
           </a:p>
           <a:p>
-            <a:pPr>
+            <a:pPr lvl="0" marL="457200" indent="-228600">
+              <a:buFont typeface="Calibri"/>
               <a:spcAft>
                 <a:spcPts val="1000"/>
               </a:spcAft>
+              <a:buSzPct val="100000"/>
               <a:buChar char="•"/>
               <a:lnSpc>
                 <a:spcPts val="2200"/>
@@ -5170,10 +5202,12 @@
             </a:r>
           </a:p>
           <a:p>
-            <a:pPr>
+            <a:pPr lvl="0" marL="457200" indent="-228600">
+              <a:buFont typeface="Calibri"/>
               <a:spcAft>
                 <a:spcPts val="1000"/>
               </a:spcAft>
+              <a:buSzPct val="100000"/>
               <a:buChar char="•"/>
               <a:lnSpc>
                 <a:spcPts val="2200"/>
@@ -5309,10 +5343,12 @@
           </a:bodyPr>
           <a:lstStyle/>
           <a:p>
-            <a:pPr>
+            <a:pPr lvl="0" marL="457200" indent="-228600">
+              <a:buFont typeface="Calibri"/>
               <a:spcAft>
                 <a:spcPts val="1000"/>
               </a:spcAft>
+              <a:buSzPct val="100000"/>
               <a:buChar char="•"/>
               <a:lnSpc>
                 <a:spcPts val="2200"/>
@@ -5329,10 +5365,12 @@
             </a:r>
           </a:p>
           <a:p>
-            <a:pPr>
+            <a:pPr lvl="0" marL="457200" indent="-228600">
+              <a:buFont typeface="Calibri"/>
               <a:spcAft>
                 <a:spcPts val="1000"/>
               </a:spcAft>
+              <a:buSzPct val="100000"/>
               <a:buChar char="•"/>
               <a:lnSpc>
                 <a:spcPts val="2200"/>
@@ -5349,10 +5387,12 @@
             </a:r>
           </a:p>
           <a:p>
-            <a:pPr>
+            <a:pPr lvl="0" marL="457200" indent="-228600">
+              <a:buFont typeface="Calibri"/>
               <a:spcAft>
                 <a:spcPts val="1000"/>
               </a:spcAft>
+              <a:buSzPct val="100000"/>
               <a:buChar char="•"/>
               <a:lnSpc>
                 <a:spcPts val="2200"/>
@@ -5488,10 +5528,12 @@
           </a:bodyPr>
           <a:lstStyle/>
           <a:p>
-            <a:pPr>
+            <a:pPr lvl="0" marL="457200" indent="-228600">
+              <a:buFont typeface="Calibri"/>
               <a:spcAft>
                 <a:spcPts val="1000"/>
               </a:spcAft>
+              <a:buSzPct val="100000"/>
               <a:buChar char="•"/>
               <a:lnSpc>
                 <a:spcPts val="2200"/>
@@ -5508,10 +5550,12 @@
             </a:r>
           </a:p>
           <a:p>
-            <a:pPr>
+            <a:pPr lvl="0" marL="457200" indent="-228600">
+              <a:buFont typeface="Calibri"/>
               <a:spcAft>
                 <a:spcPts val="1000"/>
               </a:spcAft>
+              <a:buSzPct val="100000"/>
               <a:buChar char="•"/>
               <a:lnSpc>
                 <a:spcPts val="2200"/>
